--- a/docs/pptx/auc3/ritu-auc3-adjcif-akikdigo.pptx
+++ b/docs/pptx/auc3/ritu-auc3-adjcif-akikdigo.pptx
@@ -2271,7 +2271,7 @@
           </p:nvSpPr>
           <p:spPr>
             <a:xfrm>
-              <a:off x="972874" y="5094167"/>
+              <a:off x="972874" y="5097568"/>
               <a:ext cx="7644336" cy="0"/>
             </a:xfrm>
             <a:custGeom>
@@ -2314,7 +2314,7 @@
           </p:nvSpPr>
           <p:spPr>
             <a:xfrm>
-              <a:off x="972874" y="4121659"/>
+              <a:off x="972874" y="4131860"/>
               <a:ext cx="7644336" cy="0"/>
             </a:xfrm>
             <a:custGeom>
@@ -2357,7 +2357,7 @@
           </p:nvSpPr>
           <p:spPr>
             <a:xfrm>
-              <a:off x="972874" y="3149150"/>
+              <a:off x="972874" y="3166152"/>
               <a:ext cx="7644336" cy="0"/>
             </a:xfrm>
             <a:custGeom>
@@ -2615,7 +2615,7 @@
           </p:nvSpPr>
           <p:spPr>
             <a:xfrm>
-              <a:off x="972874" y="4607913"/>
+              <a:off x="972874" y="4614714"/>
               <a:ext cx="7644336" cy="0"/>
             </a:xfrm>
             <a:custGeom>
@@ -2658,7 +2658,7 @@
           </p:nvSpPr>
           <p:spPr>
             <a:xfrm>
-              <a:off x="972874" y="3635404"/>
+              <a:off x="972874" y="3649006"/>
               <a:ext cx="7644336" cy="0"/>
             </a:xfrm>
             <a:custGeom>
@@ -2701,7 +2701,7 @@
           </p:nvSpPr>
           <p:spPr>
             <a:xfrm>
-              <a:off x="972874" y="2662896"/>
+              <a:off x="972874" y="2683298"/>
               <a:ext cx="7644336" cy="0"/>
             </a:xfrm>
             <a:custGeom>
@@ -2916,7 +2916,7 @@
           </p:nvSpPr>
           <p:spPr>
             <a:xfrm>
-              <a:off x="1320344" y="3918295"/>
+              <a:off x="1320344" y="3918294"/>
               <a:ext cx="6949396" cy="1393052"/>
             </a:xfrm>
             <a:custGeom>
@@ -3096,7 +3096,7 @@
           </p:nvSpPr>
           <p:spPr>
             <a:xfrm>
-              <a:off x="692708" y="4567862"/>
+              <a:off x="692708" y="4574663"/>
               <a:ext cx="217535" cy="80101"/>
             </a:xfrm>
             <a:prstGeom prst="rect">
@@ -3142,7 +3142,7 @@
           </p:nvSpPr>
           <p:spPr>
             <a:xfrm>
-              <a:off x="692708" y="3595354"/>
+              <a:off x="692708" y="3608955"/>
               <a:ext cx="217535" cy="80101"/>
             </a:xfrm>
             <a:prstGeom prst="rect">
@@ -3188,7 +3188,7 @@
           </p:nvSpPr>
           <p:spPr>
             <a:xfrm>
-              <a:off x="692708" y="2622845"/>
+              <a:off x="692708" y="2643248"/>
               <a:ext cx="217535" cy="80101"/>
             </a:xfrm>
             <a:prstGeom prst="rect">
